--- a/report/Ứng dụng LSTM trong Phân tích kỹ thuật - Do Manh Hoang.pptx
+++ b/report/Ứng dụng LSTM trong Phân tích kỹ thuật - Do Manh Hoang.pptx
@@ -5,21 +5,23 @@
     <p:sldMasterId id="2147483948" r:id="rId1"/>
   </p:sldMasterIdLst>
   <p:notesMasterIdLst>
-    <p:notesMasterId r:id="rId14"/>
+    <p:notesMasterId r:id="rId16"/>
   </p:notesMasterIdLst>
   <p:sldIdLst>
     <p:sldId id="256" r:id="rId2"/>
     <p:sldId id="257" r:id="rId3"/>
     <p:sldId id="266" r:id="rId4"/>
     <p:sldId id="258" r:id="rId5"/>
-    <p:sldId id="268" r:id="rId6"/>
-    <p:sldId id="259" r:id="rId7"/>
-    <p:sldId id="260" r:id="rId8"/>
-    <p:sldId id="261" r:id="rId9"/>
-    <p:sldId id="262" r:id="rId10"/>
-    <p:sldId id="263" r:id="rId11"/>
-    <p:sldId id="264" r:id="rId12"/>
-    <p:sldId id="265" r:id="rId13"/>
+    <p:sldId id="269" r:id="rId6"/>
+    <p:sldId id="270" r:id="rId7"/>
+    <p:sldId id="268" r:id="rId8"/>
+    <p:sldId id="259" r:id="rId9"/>
+    <p:sldId id="260" r:id="rId10"/>
+    <p:sldId id="261" r:id="rId11"/>
+    <p:sldId id="262" r:id="rId12"/>
+    <p:sldId id="263" r:id="rId13"/>
+    <p:sldId id="264" r:id="rId14"/>
+    <p:sldId id="265" r:id="rId15"/>
   </p:sldIdLst>
   <p:sldSz cx="9144000" cy="6858000" type="screen4x3"/>
   <p:notesSz cx="6858000" cy="9144000"/>
@@ -203,7 +205,7 @@
           <a:p>
             <a:fld id="{796E8555-6B94-459D-9D82-B4AAB85CDA5A}" type="datetimeFigureOut">
               <a:rPr lang="en-US" smtClean="0"/>
-              <a:t>1/20/2026</a:t>
+              <a:t>3/3/2026</a:t>
             </a:fld>
             <a:endParaRPr lang="en-US"/>
           </a:p>
@@ -559,6 +561,182 @@
 </p:notes>
 </file>
 
+<file path=ppt/notesSlides/notesSlide2.xml><?xml version="1.0" encoding="utf-8"?>
+<p:notes xmlns:a="http://schemas.openxmlformats.org/drawingml/2006/main" xmlns:r="http://schemas.openxmlformats.org/officeDocument/2006/relationships" xmlns:p="http://schemas.openxmlformats.org/presentationml/2006/main">
+  <p:cSld>
+    <p:spTree>
+      <p:nvGrpSpPr>
+        <p:cNvPr id="1" name=""/>
+        <p:cNvGrpSpPr/>
+        <p:nvPr/>
+      </p:nvGrpSpPr>
+      <p:grpSpPr>
+        <a:xfrm>
+          <a:off x="0" y="0"/>
+          <a:ext cx="0" cy="0"/>
+          <a:chOff x="0" y="0"/>
+          <a:chExt cx="0" cy="0"/>
+        </a:xfrm>
+      </p:grpSpPr>
+      <p:sp>
+        <p:nvSpPr>
+          <p:cNvPr id="2" name="Slide Image Placeholder 1"/>
+          <p:cNvSpPr>
+            <a:spLocks noGrp="1" noRot="1" noChangeAspect="1"/>
+          </p:cNvSpPr>
+          <p:nvPr>
+            <p:ph type="sldImg"/>
+          </p:nvPr>
+        </p:nvSpPr>
+        <p:spPr/>
+      </p:sp>
+      <p:sp>
+        <p:nvSpPr>
+          <p:cNvPr id="3" name="Notes Placeholder 2"/>
+          <p:cNvSpPr>
+            <a:spLocks noGrp="1"/>
+          </p:cNvSpPr>
+          <p:nvPr>
+            <p:ph type="body" idx="1"/>
+          </p:nvPr>
+        </p:nvSpPr>
+        <p:spPr/>
+        <p:txBody>
+          <a:bodyPr/>
+          <a:lstStyle/>
+          <a:p>
+            <a:r>
+              <a:rPr lang="en-US" dirty="0" smtClean="0"/>
+              <a:t>https://jontalle.web.engr.illinois.edu/Public////Elman-FindingStructureinTime.90.pdf</a:t>
+            </a:r>
+            <a:endParaRPr lang="en-US" dirty="0"/>
+          </a:p>
+        </p:txBody>
+      </p:sp>
+      <p:sp>
+        <p:nvSpPr>
+          <p:cNvPr id="4" name="Slide Number Placeholder 3"/>
+          <p:cNvSpPr>
+            <a:spLocks noGrp="1"/>
+          </p:cNvSpPr>
+          <p:nvPr>
+            <p:ph type="sldNum" sz="quarter" idx="10"/>
+          </p:nvPr>
+        </p:nvSpPr>
+        <p:spPr/>
+        <p:txBody>
+          <a:bodyPr/>
+          <a:lstStyle/>
+          <a:p>
+            <a:fld id="{35803B77-E789-464A-B87D-F417A54618B5}" type="slidenum">
+              <a:rPr lang="en-US" smtClean="0"/>
+              <a:t>5</a:t>
+            </a:fld>
+            <a:endParaRPr lang="en-US"/>
+          </a:p>
+        </p:txBody>
+      </p:sp>
+    </p:spTree>
+    <p:extLst>
+      <p:ext uri="{BB962C8B-B14F-4D97-AF65-F5344CB8AC3E}">
+        <p14:creationId xmlns:p14="http://schemas.microsoft.com/office/powerpoint/2010/main" val="2730350400"/>
+      </p:ext>
+    </p:extLst>
+  </p:cSld>
+  <p:clrMapOvr>
+    <a:masterClrMapping/>
+  </p:clrMapOvr>
+</p:notes>
+</file>
+
+<file path=ppt/notesSlides/notesSlide3.xml><?xml version="1.0" encoding="utf-8"?>
+<p:notes xmlns:a="http://schemas.openxmlformats.org/drawingml/2006/main" xmlns:r="http://schemas.openxmlformats.org/officeDocument/2006/relationships" xmlns:p="http://schemas.openxmlformats.org/presentationml/2006/main">
+  <p:cSld>
+    <p:spTree>
+      <p:nvGrpSpPr>
+        <p:cNvPr id="1" name=""/>
+        <p:cNvGrpSpPr/>
+        <p:nvPr/>
+      </p:nvGrpSpPr>
+      <p:grpSpPr>
+        <a:xfrm>
+          <a:off x="0" y="0"/>
+          <a:ext cx="0" cy="0"/>
+          <a:chOff x="0" y="0"/>
+          <a:chExt cx="0" cy="0"/>
+        </a:xfrm>
+      </p:grpSpPr>
+      <p:sp>
+        <p:nvSpPr>
+          <p:cNvPr id="2" name="Slide Image Placeholder 1"/>
+          <p:cNvSpPr>
+            <a:spLocks noGrp="1" noRot="1" noChangeAspect="1"/>
+          </p:cNvSpPr>
+          <p:nvPr>
+            <p:ph type="sldImg"/>
+          </p:nvPr>
+        </p:nvSpPr>
+        <p:spPr/>
+      </p:sp>
+      <p:sp>
+        <p:nvSpPr>
+          <p:cNvPr id="3" name="Notes Placeholder 2"/>
+          <p:cNvSpPr>
+            <a:spLocks noGrp="1"/>
+          </p:cNvSpPr>
+          <p:nvPr>
+            <p:ph type="body" idx="1"/>
+          </p:nvPr>
+        </p:nvSpPr>
+        <p:spPr/>
+        <p:txBody>
+          <a:bodyPr/>
+          <a:lstStyle/>
+          <a:p>
+            <a:r>
+              <a:rPr lang="en-US" dirty="0" smtClean="0"/>
+              <a:t>https://www.bioinf.jku.at/publications/older/2604.pdf</a:t>
+            </a:r>
+            <a:endParaRPr lang="en-US" dirty="0"/>
+          </a:p>
+        </p:txBody>
+      </p:sp>
+      <p:sp>
+        <p:nvSpPr>
+          <p:cNvPr id="4" name="Slide Number Placeholder 3"/>
+          <p:cNvSpPr>
+            <a:spLocks noGrp="1"/>
+          </p:cNvSpPr>
+          <p:nvPr>
+            <p:ph type="sldNum" sz="quarter" idx="10"/>
+          </p:nvPr>
+        </p:nvSpPr>
+        <p:spPr/>
+        <p:txBody>
+          <a:bodyPr/>
+          <a:lstStyle/>
+          <a:p>
+            <a:fld id="{35803B77-E789-464A-B87D-F417A54618B5}" type="slidenum">
+              <a:rPr lang="en-US" smtClean="0"/>
+              <a:t>6</a:t>
+            </a:fld>
+            <a:endParaRPr lang="en-US"/>
+          </a:p>
+        </p:txBody>
+      </p:sp>
+    </p:spTree>
+    <p:extLst>
+      <p:ext uri="{BB962C8B-B14F-4D97-AF65-F5344CB8AC3E}">
+        <p14:creationId xmlns:p14="http://schemas.microsoft.com/office/powerpoint/2010/main" val="3107208129"/>
+      </p:ext>
+    </p:extLst>
+  </p:cSld>
+  <p:clrMapOvr>
+    <a:masterClrMapping/>
+  </p:clrMapOvr>
+</p:notes>
+</file>
+
 <file path=ppt/slideLayouts/slideLayout1.xml><?xml version="1.0" encoding="utf-8"?>
 <p:sldLayout xmlns:a="http://schemas.openxmlformats.org/drawingml/2006/main" xmlns:r="http://schemas.openxmlformats.org/officeDocument/2006/relationships" xmlns:p="http://schemas.openxmlformats.org/presentationml/2006/main" showMasterSp="0" type="title" preserve="1">
   <p:cSld name="Title Slide">
@@ -839,7 +1017,7 @@
           <a:p>
             <a:fld id="{624C329D-957B-42CE-AD10-BB686921068A}" type="datetimeFigureOut">
               <a:rPr lang="en-US" smtClean="0"/>
-              <a:t>1/20/2026</a:t>
+              <a:t>3/3/2026</a:t>
             </a:fld>
             <a:endParaRPr lang="en-US"/>
           </a:p>
@@ -1232,7 +1410,7 @@
           <a:p>
             <a:fld id="{624C329D-957B-42CE-AD10-BB686921068A}" type="datetimeFigureOut">
               <a:rPr lang="en-US" smtClean="0"/>
-              <a:t>1/20/2026</a:t>
+              <a:t>3/3/2026</a:t>
             </a:fld>
             <a:endParaRPr lang="en-US"/>
           </a:p>
@@ -1764,7 +1942,7 @@
           <a:p>
             <a:fld id="{624C329D-957B-42CE-AD10-BB686921068A}" type="datetimeFigureOut">
               <a:rPr lang="en-US" smtClean="0"/>
-              <a:t>1/20/2026</a:t>
+              <a:t>3/3/2026</a:t>
             </a:fld>
             <a:endParaRPr lang="en-US"/>
           </a:p>
@@ -1897,7 +2075,7 @@
           <a:p>
             <a:fld id="{624C329D-957B-42CE-AD10-BB686921068A}" type="datetimeFigureOut">
               <a:rPr lang="en-US" smtClean="0"/>
-              <a:t>1/20/2026</a:t>
+              <a:t>3/3/2026</a:t>
             </a:fld>
             <a:endParaRPr lang="en-US"/>
           </a:p>
@@ -2440,7 +2618,7 @@
           <a:p>
             <a:fld id="{624C329D-957B-42CE-AD10-BB686921068A}" type="datetimeFigureOut">
               <a:rPr lang="en-US" smtClean="0"/>
-              <a:t>1/20/2026</a:t>
+              <a:t>3/3/2026</a:t>
             </a:fld>
             <a:endParaRPr lang="en-US"/>
           </a:p>
@@ -2735,7 +2913,7 @@
           <a:p>
             <a:fld id="{624C329D-957B-42CE-AD10-BB686921068A}" type="datetimeFigureOut">
               <a:rPr lang="en-US" smtClean="0"/>
-              <a:t>1/20/2026</a:t>
+              <a:t>3/3/2026</a:t>
             </a:fld>
             <a:endParaRPr lang="en-US"/>
           </a:p>
@@ -3394,7 +3572,7 @@
           <a:p>
             <a:fld id="{624C329D-957B-42CE-AD10-BB686921068A}" type="datetimeFigureOut">
               <a:rPr lang="en-US" smtClean="0"/>
-              <a:t>1/20/2026</a:t>
+              <a:t>3/3/2026</a:t>
             </a:fld>
             <a:endParaRPr lang="en-US"/>
           </a:p>
@@ -3830,7 +4008,7 @@
           <a:p>
             <a:fld id="{624C329D-957B-42CE-AD10-BB686921068A}" type="datetimeFigureOut">
               <a:rPr lang="en-US" smtClean="0"/>
-              <a:t>1/20/2026</a:t>
+              <a:t>3/3/2026</a:t>
             </a:fld>
             <a:endParaRPr lang="en-US"/>
           </a:p>
@@ -4143,7 +4321,7 @@
           <a:p>
             <a:fld id="{624C329D-957B-42CE-AD10-BB686921068A}" type="datetimeFigureOut">
               <a:rPr lang="en-US" smtClean="0"/>
-              <a:t>1/20/2026</a:t>
+              <a:t>3/3/2026</a:t>
             </a:fld>
             <a:endParaRPr lang="en-US"/>
           </a:p>
@@ -4875,7 +5053,7 @@
           <a:p>
             <a:fld id="{624C329D-957B-42CE-AD10-BB686921068A}" type="datetimeFigureOut">
               <a:rPr lang="en-US" smtClean="0"/>
-              <a:t>1/20/2026</a:t>
+              <a:t>3/3/2026</a:t>
             </a:fld>
             <a:endParaRPr lang="en-US"/>
           </a:p>
@@ -5539,7 +5717,7 @@
           <a:p>
             <a:fld id="{624C329D-957B-42CE-AD10-BB686921068A}" type="datetimeFigureOut">
               <a:rPr lang="en-US" smtClean="0"/>
-              <a:t>1/20/2026</a:t>
+              <a:t>3/3/2026</a:t>
             </a:fld>
             <a:endParaRPr lang="en-US"/>
           </a:p>
@@ -5812,7 +5990,7 @@
           <a:p>
             <a:fld id="{624C329D-957B-42CE-AD10-BB686921068A}" type="datetimeFigureOut">
               <a:rPr lang="en-US" smtClean="0"/>
-              <a:t>1/20/2026</a:t>
+              <a:t>3/3/2026</a:t>
             </a:fld>
             <a:endParaRPr lang="en-US"/>
           </a:p>
@@ -6961,6 +7139,514 @@
 </file>
 
 <file path=ppt/slides/slide10.xml><?xml version="1.0" encoding="utf-8"?>
+<p:sld xmlns:a="http://schemas.openxmlformats.org/drawingml/2006/main" xmlns:r="http://schemas.openxmlformats.org/officeDocument/2006/relationships" xmlns:p="http://schemas.openxmlformats.org/presentationml/2006/main">
+  <p:cSld>
+    <p:spTree>
+      <p:nvGrpSpPr>
+        <p:cNvPr id="1" name=""/>
+        <p:cNvGrpSpPr/>
+        <p:nvPr/>
+      </p:nvGrpSpPr>
+      <p:grpSpPr>
+        <a:xfrm>
+          <a:off x="0" y="0"/>
+          <a:ext cx="0" cy="0"/>
+          <a:chOff x="0" y="0"/>
+          <a:chExt cx="0" cy="0"/>
+        </a:xfrm>
+      </p:grpSpPr>
+      <p:sp>
+        <p:nvSpPr>
+          <p:cNvPr id="2" name="Title 1"/>
+          <p:cNvSpPr>
+            <a:spLocks noGrp="1"/>
+          </p:cNvSpPr>
+          <p:nvPr>
+            <p:ph type="title"/>
+          </p:nvPr>
+        </p:nvSpPr>
+        <p:spPr/>
+        <p:txBody>
+          <a:bodyPr>
+            <a:normAutofit/>
+          </a:bodyPr>
+          <a:lstStyle/>
+          <a:p>
+            <a:r>
+              <a:rPr lang="vi-VN" sz="2800" b="1" cap="all" dirty="0"/>
+              <a:t>Dự báo tương lai (Encoder-Decoder</a:t>
+            </a:r>
+            <a:r>
+              <a:rPr lang="vi-VN" sz="2800" b="1" cap="all" dirty="0" smtClean="0"/>
+              <a:t>)</a:t>
+            </a:r>
+            <a:endParaRPr lang="en-US" sz="2800" dirty="0"/>
+          </a:p>
+        </p:txBody>
+      </p:sp>
+      <p:sp>
+        <p:nvSpPr>
+          <p:cNvPr id="3" name="Content Placeholder 2"/>
+          <p:cNvSpPr>
+            <a:spLocks noGrp="1"/>
+          </p:cNvSpPr>
+          <p:nvPr>
+            <p:ph sz="half" idx="1"/>
+          </p:nvPr>
+        </p:nvSpPr>
+        <p:spPr/>
+        <p:txBody>
+          <a:bodyPr anchor="ctr">
+            <a:normAutofit/>
+          </a:bodyPr>
+          <a:lstStyle/>
+          <a:p>
+            <a:r>
+              <a:rPr lang="vi-VN" sz="2000" b="1" dirty="0"/>
+              <a:t>Encoder (Mã hóa)</a:t>
+            </a:r>
+          </a:p>
+          <a:p>
+            <a:r>
+              <a:rPr lang="vi-VN" sz="2000" dirty="0"/>
+              <a:t>Nén 60 ngày dữ liệu lịch sử thành một vector thông tin đặc trưng (Context Vector). Đây là "bộ nhớ" tóm tắt quá khứ</a:t>
+            </a:r>
+            <a:r>
+              <a:rPr lang="vi-VN" sz="2000" dirty="0" smtClean="0"/>
+              <a:t>.</a:t>
+            </a:r>
+            <a:endParaRPr lang="vi-VN" sz="2000" dirty="0"/>
+          </a:p>
+        </p:txBody>
+      </p:sp>
+      <p:sp>
+        <p:nvSpPr>
+          <p:cNvPr id="4" name="Content Placeholder 3"/>
+          <p:cNvSpPr>
+            <a:spLocks noGrp="1"/>
+          </p:cNvSpPr>
+          <p:nvPr>
+            <p:ph sz="half" idx="2"/>
+          </p:nvPr>
+        </p:nvSpPr>
+        <p:spPr/>
+        <p:txBody>
+          <a:bodyPr anchor="ctr">
+            <a:normAutofit/>
+          </a:bodyPr>
+          <a:lstStyle/>
+          <a:p>
+            <a:r>
+              <a:rPr lang="en-US" sz="2000" b="1" dirty="0"/>
+              <a:t>Decoder (</a:t>
+            </a:r>
+            <a:r>
+              <a:rPr lang="en-US" sz="2000" b="1" dirty="0" err="1"/>
+              <a:t>Giải</a:t>
+            </a:r>
+            <a:r>
+              <a:rPr lang="en-US" sz="2000" b="1" dirty="0"/>
+              <a:t> </a:t>
+            </a:r>
+            <a:r>
+              <a:rPr lang="en-US" sz="2000" b="1" dirty="0" err="1"/>
+              <a:t>mã</a:t>
+            </a:r>
+            <a:r>
+              <a:rPr lang="en-US" sz="2000" b="1" dirty="0"/>
+              <a:t>)</a:t>
+            </a:r>
+          </a:p>
+          <a:p>
+            <a:r>
+              <a:rPr lang="en-US" sz="2000" dirty="0" err="1"/>
+              <a:t>Từ</a:t>
+            </a:r>
+            <a:r>
+              <a:rPr lang="en-US" sz="2000" dirty="0"/>
+              <a:t> vector </a:t>
+            </a:r>
+            <a:r>
+              <a:rPr lang="en-US" sz="2000" dirty="0" err="1"/>
+              <a:t>bối</a:t>
+            </a:r>
+            <a:r>
+              <a:rPr lang="en-US" sz="2000" dirty="0"/>
+              <a:t> </a:t>
+            </a:r>
+            <a:r>
+              <a:rPr lang="en-US" sz="2000" dirty="0" err="1"/>
+              <a:t>cảnh</a:t>
+            </a:r>
+            <a:r>
+              <a:rPr lang="en-US" sz="2000" dirty="0"/>
+              <a:t>, </a:t>
+            </a:r>
+            <a:r>
+              <a:rPr lang="en-US" sz="2000" dirty="0" err="1"/>
+              <a:t>mô</a:t>
+            </a:r>
+            <a:r>
+              <a:rPr lang="en-US" sz="2000" dirty="0"/>
+              <a:t> </a:t>
+            </a:r>
+            <a:r>
+              <a:rPr lang="en-US" sz="2000" dirty="0" err="1"/>
+              <a:t>hình</a:t>
+            </a:r>
+            <a:r>
+              <a:rPr lang="en-US" sz="2000" dirty="0"/>
+              <a:t> "</a:t>
+            </a:r>
+            <a:r>
+              <a:rPr lang="en-US" sz="2000" dirty="0" err="1"/>
+              <a:t>vẽ</a:t>
+            </a:r>
+            <a:r>
+              <a:rPr lang="en-US" sz="2000" dirty="0"/>
+              <a:t>" </a:t>
+            </a:r>
+            <a:r>
+              <a:rPr lang="en-US" sz="2000" dirty="0" err="1"/>
+              <a:t>ra</a:t>
+            </a:r>
+            <a:r>
+              <a:rPr lang="en-US" sz="2000" dirty="0"/>
+              <a:t> </a:t>
+            </a:r>
+            <a:r>
+              <a:rPr lang="en-US" sz="2000" dirty="0" err="1"/>
+              <a:t>chuỗi</a:t>
+            </a:r>
+            <a:r>
+              <a:rPr lang="en-US" sz="2000" dirty="0"/>
+              <a:t> </a:t>
+            </a:r>
+            <a:r>
+              <a:rPr lang="en-US" sz="2000" dirty="0" err="1"/>
+              <a:t>giá</a:t>
+            </a:r>
+            <a:r>
+              <a:rPr lang="en-US" sz="2000" dirty="0"/>
+              <a:t> </a:t>
+            </a:r>
+            <a:r>
+              <a:rPr lang="en-US" sz="2000" dirty="0" err="1"/>
+              <a:t>dự</a:t>
+            </a:r>
+            <a:r>
+              <a:rPr lang="en-US" sz="2000" dirty="0"/>
+              <a:t> </a:t>
+            </a:r>
+            <a:r>
+              <a:rPr lang="en-US" sz="2000" dirty="0" err="1"/>
+              <a:t>kiến</a:t>
+            </a:r>
+            <a:r>
+              <a:rPr lang="en-US" sz="2000" dirty="0"/>
+              <a:t> </a:t>
+            </a:r>
+            <a:r>
+              <a:rPr lang="en-US" sz="2000" dirty="0" err="1"/>
+              <a:t>cho</a:t>
+            </a:r>
+            <a:r>
+              <a:rPr lang="en-US" sz="2000" dirty="0"/>
+              <a:t> 7 </a:t>
+            </a:r>
+            <a:r>
+              <a:rPr lang="en-US" sz="2000" dirty="0" err="1"/>
+              <a:t>ngày</a:t>
+            </a:r>
+            <a:r>
+              <a:rPr lang="en-US" sz="2000" dirty="0"/>
+              <a:t> </a:t>
+            </a:r>
+            <a:r>
+              <a:rPr lang="en-US" sz="2000" dirty="0" err="1"/>
+              <a:t>tiếp</a:t>
+            </a:r>
+            <a:r>
+              <a:rPr lang="en-US" sz="2000" dirty="0"/>
+              <a:t> </a:t>
+            </a:r>
+            <a:r>
+              <a:rPr lang="en-US" sz="2000" dirty="0" err="1"/>
+              <a:t>theo</a:t>
+            </a:r>
+            <a:r>
+              <a:rPr lang="en-US" sz="2000" dirty="0"/>
+              <a:t> </a:t>
+            </a:r>
+            <a:r>
+              <a:rPr lang="en-US" sz="2000" dirty="0" err="1"/>
+              <a:t>một</a:t>
+            </a:r>
+            <a:r>
+              <a:rPr lang="en-US" sz="2000" dirty="0"/>
+              <a:t> </a:t>
+            </a:r>
+            <a:r>
+              <a:rPr lang="en-US" sz="2000" dirty="0" err="1"/>
+              <a:t>cách</a:t>
+            </a:r>
+            <a:r>
+              <a:rPr lang="en-US" sz="2000" dirty="0"/>
+              <a:t> </a:t>
+            </a:r>
+            <a:r>
+              <a:rPr lang="en-US" sz="2000" dirty="0" err="1"/>
+              <a:t>tuần</a:t>
+            </a:r>
+            <a:r>
+              <a:rPr lang="en-US" sz="2000" dirty="0"/>
+              <a:t> </a:t>
+            </a:r>
+            <a:r>
+              <a:rPr lang="en-US" sz="2000" dirty="0" err="1"/>
+              <a:t>tự</a:t>
+            </a:r>
+            <a:r>
+              <a:rPr lang="en-US" sz="2000" dirty="0"/>
+              <a:t> </a:t>
+            </a:r>
+            <a:r>
+              <a:rPr lang="en-US" sz="2000" dirty="0" err="1"/>
+              <a:t>và</a:t>
+            </a:r>
+            <a:r>
+              <a:rPr lang="en-US" sz="2000" dirty="0"/>
+              <a:t> logic</a:t>
+            </a:r>
+            <a:r>
+              <a:rPr lang="en-US" sz="2000" dirty="0" smtClean="0"/>
+              <a:t>.</a:t>
+            </a:r>
+            <a:endParaRPr lang="en-US" sz="2000" dirty="0"/>
+          </a:p>
+        </p:txBody>
+      </p:sp>
+      <p:sp>
+        <p:nvSpPr>
+          <p:cNvPr id="5" name="TextBox 4"/>
+          <p:cNvSpPr txBox="1"/>
+          <p:nvPr/>
+        </p:nvSpPr>
+        <p:spPr>
+          <a:xfrm>
+            <a:off x="152401" y="6378909"/>
+            <a:ext cx="8839200" cy="307777"/>
+          </a:xfrm>
+          <a:prstGeom prst="rect">
+            <a:avLst/>
+          </a:prstGeom>
+          <a:noFill/>
+        </p:spPr>
+        <p:txBody>
+          <a:bodyPr wrap="square" rtlCol="0">
+            <a:spAutoFit/>
+          </a:bodyPr>
+          <a:lstStyle/>
+          <a:p>
+            <a:r>
+              <a:rPr lang="vi-VN" sz="1400" b="1" dirty="0"/>
+              <a:t>Ưu điểm vượt trội:</a:t>
+            </a:r>
+            <a:r>
+              <a:rPr lang="vi-VN" sz="1400" dirty="0"/>
+              <a:t> Hạn chế tối đa sai số tích tụ so với phương pháp dự báo từng ngày một truyền thống.</a:t>
+            </a:r>
+            <a:endParaRPr lang="en-US" sz="1400" dirty="0"/>
+          </a:p>
+        </p:txBody>
+      </p:sp>
+    </p:spTree>
+    <p:extLst>
+      <p:ext uri="{BB962C8B-B14F-4D97-AF65-F5344CB8AC3E}">
+        <p14:creationId xmlns:p14="http://schemas.microsoft.com/office/powerpoint/2010/main" val="991988898"/>
+      </p:ext>
+    </p:extLst>
+  </p:cSld>
+  <p:clrMapOvr>
+    <a:masterClrMapping/>
+  </p:clrMapOvr>
+  <p:timing>
+    <p:tnLst>
+      <p:par>
+        <p:cTn id="1" dur="indefinite" restart="never" nodeType="tmRoot"/>
+      </p:par>
+    </p:tnLst>
+  </p:timing>
+</p:sld>
+</file>
+
+<file path=ppt/slides/slide11.xml><?xml version="1.0" encoding="utf-8"?>
+<p:sld xmlns:a="http://schemas.openxmlformats.org/drawingml/2006/main" xmlns:r="http://schemas.openxmlformats.org/officeDocument/2006/relationships" xmlns:p="http://schemas.openxmlformats.org/presentationml/2006/main">
+  <p:cSld>
+    <p:spTree>
+      <p:nvGrpSpPr>
+        <p:cNvPr id="1" name=""/>
+        <p:cNvGrpSpPr/>
+        <p:nvPr/>
+      </p:nvGrpSpPr>
+      <p:grpSpPr>
+        <a:xfrm>
+          <a:off x="0" y="0"/>
+          <a:ext cx="0" cy="0"/>
+          <a:chOff x="0" y="0"/>
+          <a:chExt cx="0" cy="0"/>
+        </a:xfrm>
+      </p:grpSpPr>
+      <p:sp>
+        <p:nvSpPr>
+          <p:cNvPr id="2" name="Title 1"/>
+          <p:cNvSpPr>
+            <a:spLocks noGrp="1"/>
+          </p:cNvSpPr>
+          <p:nvPr>
+            <p:ph type="title"/>
+          </p:nvPr>
+        </p:nvSpPr>
+        <p:spPr/>
+        <p:txBody>
+          <a:bodyPr>
+            <a:normAutofit/>
+          </a:bodyPr>
+          <a:lstStyle/>
+          <a:p>
+            <a:r>
+              <a:rPr lang="en-US" sz="2800" b="1" cap="all" dirty="0" err="1"/>
+              <a:t>Kết</a:t>
+            </a:r>
+            <a:r>
+              <a:rPr lang="en-US" sz="2800" b="1" cap="all" dirty="0"/>
+              <a:t> </a:t>
+            </a:r>
+            <a:r>
+              <a:rPr lang="en-US" sz="2800" b="1" cap="all" dirty="0" err="1"/>
+              <a:t>quả</a:t>
+            </a:r>
+            <a:r>
+              <a:rPr lang="en-US" sz="2800" b="1" cap="all" dirty="0"/>
+              <a:t> </a:t>
+            </a:r>
+            <a:r>
+              <a:rPr lang="en-US" sz="2800" b="1" cap="all" dirty="0" err="1"/>
+              <a:t>Backtest</a:t>
+            </a:r>
+            <a:r>
+              <a:rPr lang="en-US" sz="2800" b="1" cap="all" dirty="0"/>
+              <a:t> &amp; </a:t>
+            </a:r>
+            <a:r>
+              <a:rPr lang="en-US" sz="2800" b="1" cap="all" dirty="0" err="1"/>
+              <a:t>Trực</a:t>
+            </a:r>
+            <a:r>
+              <a:rPr lang="en-US" sz="2800" b="1" cap="all" dirty="0"/>
+              <a:t> </a:t>
+            </a:r>
+            <a:r>
+              <a:rPr lang="en-US" sz="2800" b="1" cap="all" dirty="0" err="1"/>
+              <a:t>quan</a:t>
+            </a:r>
+            <a:r>
+              <a:rPr lang="en-US" sz="2800" b="1" cap="all" dirty="0"/>
+              <a:t> </a:t>
+            </a:r>
+            <a:r>
+              <a:rPr lang="en-US" sz="2800" b="1" cap="all" dirty="0" err="1" smtClean="0"/>
+              <a:t>hóa</a:t>
+            </a:r>
+            <a:endParaRPr lang="en-US" sz="2800" dirty="0"/>
+          </a:p>
+        </p:txBody>
+      </p:sp>
+      <p:pic>
+        <p:nvPicPr>
+          <p:cNvPr id="2051" name="Picture 3"/>
+          <p:cNvPicPr>
+            <a:picLocks noChangeAspect="1" noChangeArrowheads="1"/>
+          </p:cNvPicPr>
+          <p:nvPr/>
+        </p:nvPicPr>
+        <p:blipFill>
+          <a:blip r:embed="rId2">
+            <a:extLst>
+              <a:ext uri="{28A0092B-C50C-407E-A947-70E740481C1C}">
+                <a14:useLocalDpi xmlns:a14="http://schemas.microsoft.com/office/drawing/2010/main" val="0"/>
+              </a:ext>
+            </a:extLst>
+          </a:blip>
+          <a:srcRect/>
+          <a:stretch>
+            <a:fillRect/>
+          </a:stretch>
+        </p:blipFill>
+        <p:spPr bwMode="auto">
+          <a:xfrm>
+            <a:off x="152400" y="1828800"/>
+            <a:ext cx="8839200" cy="4163234"/>
+          </a:xfrm>
+          <a:prstGeom prst="rect">
+            <a:avLst/>
+          </a:prstGeom>
+          <a:noFill/>
+          <a:ln>
+            <a:noFill/>
+          </a:ln>
+          <a:effectLst/>
+          <a:extLst>
+            <a:ext uri="{909E8E84-426E-40DD-AFC4-6F175D3DCCD1}">
+              <a14:hiddenFill xmlns:a14="http://schemas.microsoft.com/office/drawing/2010/main">
+                <a:solidFill>
+                  <a:schemeClr val="accent1"/>
+                </a:solidFill>
+              </a14:hiddenFill>
+            </a:ext>
+            <a:ext uri="{91240B29-F687-4F45-9708-019B960494DF}">
+              <a14:hiddenLine xmlns:a14="http://schemas.microsoft.com/office/drawing/2010/main" w="9525">
+                <a:solidFill>
+                  <a:schemeClr val="tx1"/>
+                </a:solidFill>
+                <a:miter lim="800000"/>
+                <a:headEnd/>
+                <a:tailEnd/>
+              </a14:hiddenLine>
+            </a:ext>
+            <a:ext uri="{AF507438-7753-43E0-B8FC-AC1667EBCBE1}">
+              <a14:hiddenEffects xmlns:a14="http://schemas.microsoft.com/office/drawing/2010/main">
+                <a:effectLst>
+                  <a:outerShdw dist="35921" dir="2700000" algn="ctr" rotWithShape="0">
+                    <a:schemeClr val="bg2"/>
+                  </a:outerShdw>
+                </a:effectLst>
+              </a14:hiddenEffects>
+            </a:ext>
+          </a:extLst>
+        </p:spPr>
+      </p:pic>
+    </p:spTree>
+    <p:extLst>
+      <p:ext uri="{BB962C8B-B14F-4D97-AF65-F5344CB8AC3E}">
+        <p14:creationId xmlns:p14="http://schemas.microsoft.com/office/powerpoint/2010/main" val="3278575000"/>
+      </p:ext>
+    </p:extLst>
+  </p:cSld>
+  <p:clrMapOvr>
+    <a:masterClrMapping/>
+  </p:clrMapOvr>
+  <p:timing>
+    <p:tnLst>
+      <p:par>
+        <p:cTn id="1" dur="indefinite" restart="never" nodeType="tmRoot"/>
+      </p:par>
+    </p:tnLst>
+  </p:timing>
+</p:sld>
+</file>
+
+<file path=ppt/slides/slide12.xml><?xml version="1.0" encoding="utf-8"?>
 <p:sld xmlns:a="http://schemas.openxmlformats.org/drawingml/2006/main" xmlns:r="http://schemas.openxmlformats.org/officeDocument/2006/relationships" xmlns:p="http://schemas.openxmlformats.org/presentationml/2006/main">
   <p:cSld>
     <p:spTree>
@@ -7367,7 +8053,7 @@
 </p:sld>
 </file>
 
-<file path=ppt/slides/slide11.xml><?xml version="1.0" encoding="utf-8"?>
+<file path=ppt/slides/slide13.xml><?xml version="1.0" encoding="utf-8"?>
 <p:sld xmlns:a="http://schemas.openxmlformats.org/drawingml/2006/main" xmlns:r="http://schemas.openxmlformats.org/officeDocument/2006/relationships" xmlns:p="http://schemas.openxmlformats.org/presentationml/2006/main">
   <p:cSld>
     <p:spTree>
@@ -7522,7 +8208,7 @@
 </p:sld>
 </file>
 
-<file path=ppt/slides/slide12.xml><?xml version="1.0" encoding="utf-8"?>
+<file path=ppt/slides/slide14.xml><?xml version="1.0" encoding="utf-8"?>
 <p:sld xmlns:a="http://schemas.openxmlformats.org/drawingml/2006/main" xmlns:r="http://schemas.openxmlformats.org/officeDocument/2006/relationships" xmlns:p="http://schemas.openxmlformats.org/presentationml/2006/main">
   <p:cSld>
     <p:spTree>
@@ -7911,11 +8597,7 @@
             </a:r>
             <a:r>
               <a:rPr lang="vi-VN" sz="1800" dirty="0"/>
-              <a:t>trình bày: </a:t>
-            </a:r>
-            <a:r>
-              <a:rPr lang="vi-VN" sz="1800" dirty="0"/>
-              <a:t>Đỗ Mạnh Hoàng</a:t>
+              <a:t>trình bày: Đỗ Mạnh Hoàng</a:t>
             </a:r>
             <a:r>
               <a:rPr lang="en-US" sz="1800" dirty="0"/>
@@ -8821,7 +9503,6 @@
               <a:rPr lang="vi-VN" sz="1600" dirty="0"/>
               <a:t>Tín hiệu giao dịch (Giao cắt vàng - Golden Cross): Khi đường MA ngắn hạn (như MA20) cắt lên trên đường MA dài hạn (như MA50), đó thường là tín hiệu cho một đợt tăng giá mạnh.</a:t>
             </a:r>
-            <a:endParaRPr lang="vi-VN" sz="1600" dirty="0"/>
           </a:p>
         </p:txBody>
       </p:sp>
@@ -8872,7 +9553,6 @@
               <a:rPr lang="vi-VN" sz="1600" dirty="0"/>
               <a:t>Phân kỳ (Divergence): Đây là tín hiệu mạnh nhất của RSI. Nếu giá tạo đỉnh sau cao hơn đỉnh trước, nhưng RSI lại tạo đỉnh sau thấp hơn đỉnh trước, đó là dấu hiệu cảnh báo xu hướng tăng đang suy yếu và sắp đảo chiều.</a:t>
             </a:r>
-            <a:endParaRPr lang="vi-VN" sz="1600" dirty="0"/>
           </a:p>
         </p:txBody>
       </p:sp>
@@ -8925,140 +9605,88 @@
         </p:nvSpPr>
         <p:spPr/>
         <p:txBody>
+          <a:bodyPr anchor="ctr">
+            <a:normAutofit/>
+          </a:bodyPr>
+          <a:lstStyle/>
+          <a:p>
+            <a:r>
+              <a:rPr lang="en-US" sz="2500" b="1" cap="all" dirty="0"/>
+              <a:t>RNN</a:t>
+            </a:r>
+            <a:endParaRPr lang="en-US" sz="2500" b="1" cap="all" dirty="0"/>
+          </a:p>
+        </p:txBody>
+      </p:sp>
+      <p:sp>
+        <p:nvSpPr>
+          <p:cNvPr id="3" name="Content Placeholder 2"/>
+          <p:cNvSpPr>
+            <a:spLocks noGrp="1"/>
+          </p:cNvSpPr>
+          <p:nvPr>
+            <p:ph sz="half" idx="1"/>
+          </p:nvPr>
+        </p:nvSpPr>
+        <p:spPr/>
+        <p:txBody>
           <a:bodyPr>
             <a:normAutofit/>
           </a:bodyPr>
           <a:lstStyle/>
           <a:p>
             <a:r>
-              <a:rPr lang="en-US" sz="2800" b="1" cap="all" dirty="0" err="1"/>
-              <a:t>Tại</a:t>
-            </a:r>
-            <a:r>
-              <a:rPr lang="en-US" sz="2800" b="1" cap="all" dirty="0"/>
-              <a:t> </a:t>
-            </a:r>
-            <a:r>
-              <a:rPr lang="en-US" sz="2800" b="1" cap="all" dirty="0" err="1"/>
-              <a:t>sao</a:t>
-            </a:r>
-            <a:r>
-              <a:rPr lang="en-US" sz="2800" b="1" cap="all" dirty="0"/>
-              <a:t> </a:t>
-            </a:r>
-            <a:r>
-              <a:rPr lang="en-US" sz="2800" b="1" cap="all" dirty="0" err="1"/>
-              <a:t>dùng</a:t>
-            </a:r>
-            <a:r>
-              <a:rPr lang="en-US" sz="2800" b="1" cap="all" dirty="0"/>
-              <a:t> LSTM </a:t>
-            </a:r>
-            <a:r>
-              <a:rPr lang="en-US" sz="2800" b="1" cap="all" dirty="0" err="1"/>
-              <a:t>cho</a:t>
-            </a:r>
-            <a:r>
-              <a:rPr lang="en-US" sz="2800" b="1" cap="all" dirty="0"/>
-              <a:t> </a:t>
-            </a:r>
-            <a:r>
-              <a:rPr lang="en-US" sz="2800" b="1" cap="all" dirty="0" err="1"/>
-              <a:t>Chứng</a:t>
-            </a:r>
-            <a:r>
-              <a:rPr lang="en-US" sz="2800" b="1" cap="all" dirty="0"/>
-              <a:t> </a:t>
-            </a:r>
-            <a:r>
-              <a:rPr lang="en-US" sz="2800" b="1" cap="all" dirty="0" err="1"/>
-              <a:t>khoán</a:t>
-            </a:r>
-            <a:r>
-              <a:rPr lang="en-US" sz="2800" b="1" cap="all" dirty="0" smtClean="0"/>
-              <a:t>?</a:t>
-            </a:r>
-            <a:endParaRPr lang="en-US" sz="2800" dirty="0"/>
-          </a:p>
-        </p:txBody>
-      </p:sp>
-      <p:sp>
-        <p:nvSpPr>
-          <p:cNvPr id="3" name="Content Placeholder 2"/>
-          <p:cNvSpPr>
-            <a:spLocks noGrp="1"/>
-          </p:cNvSpPr>
-          <p:nvPr>
-            <p:ph sz="half" idx="1"/>
-          </p:nvPr>
-        </p:nvSpPr>
-        <p:spPr/>
-        <p:txBody>
-          <a:bodyPr anchor="ctr">
-            <a:normAutofit/>
-          </a:bodyPr>
-          <a:lstStyle/>
-          <a:p>
-            <a:pPr marL="0" indent="0">
-              <a:buNone/>
-            </a:pPr>
-            <a:r>
-              <a:rPr lang="vi-VN" sz="1600" b="1" dirty="0"/>
-              <a:t>Trong chứng khoán, giá cổ phiếu không chỉ phụ thuộc vào ngày hôm qua mà còn bị ảnh hưởng bởi các chu kỳ, xu hướng từ nhiều tuần hoặc nhiều tháng trước. LSTM chính là công cụ mạnh mẽ nhất để giải quyết bài toán này.</a:t>
-            </a:r>
-            <a:endParaRPr lang="en-US" sz="1600" b="1" dirty="0" smtClean="0"/>
-          </a:p>
-          <a:p>
-            <a:r>
-              <a:rPr lang="vi-VN" sz="1600" b="1" dirty="0" smtClean="0"/>
-              <a:t>Khả </a:t>
-            </a:r>
-            <a:r>
-              <a:rPr lang="vi-VN" sz="1600" b="1" dirty="0"/>
-              <a:t>năng ghi nhớ:</a:t>
-            </a:r>
-            <a:r>
               <a:rPr lang="vi-VN" sz="1600" dirty="0"/>
-              <a:t> Xử lý các chuỗi dữ liệu dài hạn vượt trội hơn RNN truyền thống.</a:t>
-            </a:r>
-          </a:p>
-          <a:p>
-            <a:r>
-              <a:rPr lang="vi-VN" sz="1600" b="1" dirty="0"/>
-              <a:t>Dữ liệu phi tuyến tính:</a:t>
-            </a:r>
-            <a:r>
-              <a:rPr lang="vi-VN" sz="1600" dirty="0"/>
-              <a:t> Hiểu được các biến động phức tạp không theo đường thẳng của thị trường.</a:t>
-            </a:r>
-          </a:p>
-          <a:p>
-            <a:r>
-              <a:rPr lang="vi-VN" sz="1600" b="1" dirty="0"/>
-              <a:t>Phát hiện mẫu hình:</a:t>
-            </a:r>
-            <a:r>
-              <a:rPr lang="vi-VN" sz="1600" dirty="0"/>
-              <a:t> Tự động nhận diện các tín hiệu mà mắt người thường bỏ sót</a:t>
-            </a:r>
-            <a:r>
-              <a:rPr lang="vi-VN" sz="1600" dirty="0" smtClean="0"/>
-              <a:t>.</a:t>
-            </a:r>
-            <a:endParaRPr lang="vi-VN" sz="1600" dirty="0"/>
+              <a:t>RNN là loại mạng nơ-ron được thiết kế để xử lý dữ liệu tuần tự (Sequential Data), nơi thông tin trước đó ảnh hưởng đến dự đoán hiện tại.</a:t>
+            </a:r>
+          </a:p>
+          <a:p>
+            <a:pPr lvl="1"/>
+            <a:r>
+              <a:rPr lang="vi-VN" sz="1300" dirty="0"/>
+              <a:t>Cơ chế vòng lặp: Cho phép thông tin "tồn tại" qua các bước thời gian bằng cách truyền trạng thái ẩn (Hidden State).</a:t>
+            </a:r>
+          </a:p>
+          <a:p>
+            <a:pPr lvl="1"/>
+            <a:r>
+              <a:rPr lang="vi-VN" sz="1300" dirty="0"/>
+              <a:t>Khả năng ứng dụng: Phù hợp cho xử lý ngôn ngữ tự nhiên (NLP), dự báo chuỗi thời gian, nhận dạng giọng nói.</a:t>
+            </a:r>
+          </a:p>
+          <a:p>
+            <a:pPr lvl="1"/>
+            <a:r>
+              <a:rPr lang="vi-VN" sz="1300" dirty="0"/>
+              <a:t>Nhược điểm: Gặp vấn đề "Tiêu biến đạo hàm" (Vanishing Gradient), khó ghi nhớ thông tin trong chuỗi dài.</a:t>
+            </a:r>
+          </a:p>
+          <a:p>
+            <a:pPr lvl="1"/>
+            <a:r>
+              <a:rPr lang="vi-VN" sz="1300" dirty="0"/>
+              <a:t>ht=f(W⋅ht-1+U⋅xt</a:t>
+            </a:r>
+            <a:r>
+              <a:rPr lang="vi-VN" sz="1300" dirty="0" smtClean="0"/>
+              <a:t>)</a:t>
+            </a:r>
+            <a:endParaRPr lang="vi-VN" sz="1300" dirty="0"/>
           </a:p>
         </p:txBody>
       </p:sp>
       <p:pic>
         <p:nvPicPr>
-          <p:cNvPr id="2051" name="Picture 3"/>
+          <p:cNvPr id="1026" name="Picture 2"/>
           <p:cNvPicPr>
-            <a:picLocks noChangeAspect="1" noChangeArrowheads="1"/>
+            <a:picLocks noGrp="1" noChangeAspect="1" noChangeArrowheads="1"/>
           </p:cNvPicPr>
-          <p:nvPr/>
+          <p:nvPr>
+            <p:ph sz="half" idx="2"/>
+          </p:nvPr>
         </p:nvPicPr>
         <p:blipFill>
-          <a:blip r:embed="rId2">
+          <a:blip r:embed="rId3">
             <a:extLst>
               <a:ext uri="{28A0092B-C50C-407E-A947-70E740481C1C}">
                 <a14:useLocalDpi xmlns:a14="http://schemas.microsoft.com/office/drawing/2010/main" val="0"/>
@@ -9072,8 +9700,8 @@
         </p:blipFill>
         <p:spPr bwMode="auto">
           <a:xfrm>
-            <a:off x="4648200" y="2590800"/>
-            <a:ext cx="4267200" cy="2362200"/>
+            <a:off x="5152792" y="2788315"/>
+            <a:ext cx="3334215" cy="1848108"/>
           </a:xfrm>
           <a:prstGeom prst="rect">
             <a:avLst/>
@@ -9116,6 +9744,460 @@
     </p:spTree>
     <p:extLst>
       <p:ext uri="{BB962C8B-B14F-4D97-AF65-F5344CB8AC3E}">
+        <p14:creationId xmlns:p14="http://schemas.microsoft.com/office/powerpoint/2010/main" val="1620032593"/>
+      </p:ext>
+    </p:extLst>
+  </p:cSld>
+  <p:clrMapOvr>
+    <a:masterClrMapping/>
+  </p:clrMapOvr>
+  <p:timing>
+    <p:tnLst>
+      <p:par>
+        <p:cTn id="1" dur="indefinite" restart="never" nodeType="tmRoot"/>
+      </p:par>
+    </p:tnLst>
+  </p:timing>
+</p:sld>
+</file>
+
+<file path=ppt/slides/slide6.xml><?xml version="1.0" encoding="utf-8"?>
+<p:sld xmlns:a="http://schemas.openxmlformats.org/drawingml/2006/main" xmlns:r="http://schemas.openxmlformats.org/officeDocument/2006/relationships" xmlns:p="http://schemas.openxmlformats.org/presentationml/2006/main">
+  <p:cSld>
+    <p:spTree>
+      <p:nvGrpSpPr>
+        <p:cNvPr id="1" name=""/>
+        <p:cNvGrpSpPr/>
+        <p:nvPr/>
+      </p:nvGrpSpPr>
+      <p:grpSpPr>
+        <a:xfrm>
+          <a:off x="0" y="0"/>
+          <a:ext cx="0" cy="0"/>
+          <a:chOff x="0" y="0"/>
+          <a:chExt cx="0" cy="0"/>
+        </a:xfrm>
+      </p:grpSpPr>
+      <p:sp>
+        <p:nvSpPr>
+          <p:cNvPr id="2" name="Title 1"/>
+          <p:cNvSpPr>
+            <a:spLocks noGrp="1"/>
+          </p:cNvSpPr>
+          <p:nvPr>
+            <p:ph type="title"/>
+          </p:nvPr>
+        </p:nvSpPr>
+        <p:spPr/>
+        <p:txBody>
+          <a:bodyPr anchor="ctr">
+            <a:normAutofit/>
+          </a:bodyPr>
+          <a:lstStyle/>
+          <a:p>
+            <a:r>
+              <a:rPr lang="en-US" sz="2500" b="1" cap="all" dirty="0"/>
+              <a:t>Long Short-Term </a:t>
+            </a:r>
+            <a:r>
+              <a:rPr lang="en-US" sz="2500" b="1" cap="all" dirty="0"/>
+              <a:t>Memory (LSTM)</a:t>
+            </a:r>
+            <a:endParaRPr lang="en-US" sz="2500" b="1" cap="all" dirty="0"/>
+          </a:p>
+        </p:txBody>
+      </p:sp>
+      <p:sp>
+        <p:nvSpPr>
+          <p:cNvPr id="3" name="Content Placeholder 2"/>
+          <p:cNvSpPr>
+            <a:spLocks noGrp="1"/>
+          </p:cNvSpPr>
+          <p:nvPr>
+            <p:ph sz="half" idx="1"/>
+          </p:nvPr>
+        </p:nvSpPr>
+        <p:spPr/>
+        <p:txBody>
+          <a:bodyPr>
+            <a:normAutofit/>
+          </a:bodyPr>
+          <a:lstStyle/>
+          <a:p>
+            <a:r>
+              <a:rPr lang="vi-VN" sz="1600" dirty="0"/>
+              <a:t>LSTM là một biến thể nâng cao của RNN, được thiết kế đặc biệt để giải quyết bài toán phụ thuộc dài hạn.</a:t>
+            </a:r>
+          </a:p>
+          <a:p>
+            <a:pPr lvl="1"/>
+            <a:r>
+              <a:rPr lang="vi-VN" sz="1400" dirty="0"/>
+              <a:t>Trạng thái ô (Cell State): Đóng vai trò như "băng chuyền" thông tin, giúp duy trì dữ liệu quan trọng qua nhiều bước.</a:t>
+            </a:r>
+          </a:p>
+          <a:p>
+            <a:pPr lvl="1"/>
+            <a:r>
+              <a:rPr lang="vi-VN" sz="1400" dirty="0"/>
+              <a:t>Cấu trúc Cổng (Gates):</a:t>
+            </a:r>
+          </a:p>
+          <a:p>
+            <a:pPr lvl="2"/>
+            <a:r>
+              <a:rPr lang="vi-VN" sz="1400" dirty="0"/>
+              <a:t>Cổng Quên: Loại bỏ thông tin không cần thiết.</a:t>
+            </a:r>
+          </a:p>
+          <a:p>
+            <a:pPr lvl="2"/>
+            <a:r>
+              <a:rPr lang="vi-VN" sz="1400" dirty="0"/>
+              <a:t>Cổng Nhập: Cập nhật thông tin mới vào Cell State.</a:t>
+            </a:r>
+          </a:p>
+          <a:p>
+            <a:pPr lvl="2"/>
+            <a:r>
+              <a:rPr lang="vi-VN" sz="1400" dirty="0"/>
+              <a:t>Cổng Xuất: Quyết định giá trị đầu ra.</a:t>
+            </a:r>
+          </a:p>
+          <a:p>
+            <a:r>
+              <a:rPr lang="vi-VN" sz="1600" dirty="0"/>
+              <a:t>Ưu điểm: Hiệu quả vượt trội trong việc ghi nhớ ngữ cảnh xa, tránh hiện tượng tiêu biến đạo </a:t>
+            </a:r>
+            <a:r>
+              <a:rPr lang="vi-VN" sz="1600" dirty="0" smtClean="0"/>
+              <a:t>hàm</a:t>
+            </a:r>
+            <a:r>
+              <a:rPr lang="en-US" sz="1600" dirty="0" smtClean="0"/>
+              <a:t> </a:t>
+            </a:r>
+            <a:r>
+              <a:rPr lang="vi-VN" sz="1600" dirty="0"/>
+              <a:t>(Vanishing Gradient)</a:t>
+            </a:r>
+            <a:r>
+              <a:rPr lang="vi-VN" sz="1900" dirty="0" smtClean="0"/>
+              <a:t>.</a:t>
+            </a:r>
+            <a:endParaRPr lang="vi-VN" sz="1900" dirty="0"/>
+          </a:p>
+          <a:p>
+            <a:endParaRPr lang="en-US" dirty="0"/>
+          </a:p>
+        </p:txBody>
+      </p:sp>
+      <p:pic>
+        <p:nvPicPr>
+          <p:cNvPr id="2050" name="Picture 2"/>
+          <p:cNvPicPr>
+            <a:picLocks noGrp="1" noChangeAspect="1" noChangeArrowheads="1"/>
+          </p:cNvPicPr>
+          <p:nvPr>
+            <p:ph sz="half" idx="2"/>
+          </p:nvPr>
+        </p:nvPicPr>
+        <p:blipFill>
+          <a:blip r:embed="rId3">
+            <a:extLst>
+              <a:ext uri="{28A0092B-C50C-407E-A947-70E740481C1C}">
+                <a14:useLocalDpi xmlns:a14="http://schemas.microsoft.com/office/drawing/2010/main" val="0"/>
+              </a:ext>
+            </a:extLst>
+          </a:blip>
+          <a:srcRect/>
+          <a:stretch>
+            <a:fillRect/>
+          </a:stretch>
+        </p:blipFill>
+        <p:spPr bwMode="auto">
+          <a:xfrm>
+            <a:off x="5048002" y="2807367"/>
+            <a:ext cx="3543795" cy="1810003"/>
+          </a:xfrm>
+          <a:prstGeom prst="rect">
+            <a:avLst/>
+          </a:prstGeom>
+          <a:noFill/>
+          <a:ln>
+            <a:noFill/>
+          </a:ln>
+          <a:effectLst/>
+          <a:extLst>
+            <a:ext uri="{909E8E84-426E-40DD-AFC4-6F175D3DCCD1}">
+              <a14:hiddenFill xmlns:a14="http://schemas.microsoft.com/office/drawing/2010/main">
+                <a:solidFill>
+                  <a:schemeClr val="accent1"/>
+                </a:solidFill>
+              </a14:hiddenFill>
+            </a:ext>
+            <a:ext uri="{91240B29-F687-4F45-9708-019B960494DF}">
+              <a14:hiddenLine xmlns:a14="http://schemas.microsoft.com/office/drawing/2010/main" w="9525">
+                <a:solidFill>
+                  <a:schemeClr val="tx1"/>
+                </a:solidFill>
+                <a:miter lim="800000"/>
+                <a:headEnd/>
+                <a:tailEnd/>
+              </a14:hiddenLine>
+            </a:ext>
+            <a:ext uri="{AF507438-7753-43E0-B8FC-AC1667EBCBE1}">
+              <a14:hiddenEffects xmlns:a14="http://schemas.microsoft.com/office/drawing/2010/main">
+                <a:effectLst>
+                  <a:outerShdw dist="35921" dir="2700000" algn="ctr" rotWithShape="0">
+                    <a:schemeClr val="bg2"/>
+                  </a:outerShdw>
+                </a:effectLst>
+              </a14:hiddenEffects>
+            </a:ext>
+          </a:extLst>
+        </p:spPr>
+      </p:pic>
+    </p:spTree>
+    <p:extLst>
+      <p:ext uri="{BB962C8B-B14F-4D97-AF65-F5344CB8AC3E}">
+        <p14:creationId xmlns:p14="http://schemas.microsoft.com/office/powerpoint/2010/main" val="2528383073"/>
+      </p:ext>
+    </p:extLst>
+  </p:cSld>
+  <p:clrMapOvr>
+    <a:masterClrMapping/>
+  </p:clrMapOvr>
+  <p:timing>
+    <p:tnLst>
+      <p:par>
+        <p:cTn id="1" dur="indefinite" restart="never" nodeType="tmRoot"/>
+      </p:par>
+    </p:tnLst>
+  </p:timing>
+</p:sld>
+</file>
+
+<file path=ppt/slides/slide7.xml><?xml version="1.0" encoding="utf-8"?>
+<p:sld xmlns:a="http://schemas.openxmlformats.org/drawingml/2006/main" xmlns:r="http://schemas.openxmlformats.org/officeDocument/2006/relationships" xmlns:p="http://schemas.openxmlformats.org/presentationml/2006/main">
+  <p:cSld>
+    <p:spTree>
+      <p:nvGrpSpPr>
+        <p:cNvPr id="1" name=""/>
+        <p:cNvGrpSpPr/>
+        <p:nvPr/>
+      </p:nvGrpSpPr>
+      <p:grpSpPr>
+        <a:xfrm>
+          <a:off x="0" y="0"/>
+          <a:ext cx="0" cy="0"/>
+          <a:chOff x="0" y="0"/>
+          <a:chExt cx="0" cy="0"/>
+        </a:xfrm>
+      </p:grpSpPr>
+      <p:sp>
+        <p:nvSpPr>
+          <p:cNvPr id="2" name="Title 1"/>
+          <p:cNvSpPr>
+            <a:spLocks noGrp="1"/>
+          </p:cNvSpPr>
+          <p:nvPr>
+            <p:ph type="title"/>
+          </p:nvPr>
+        </p:nvSpPr>
+        <p:spPr/>
+        <p:txBody>
+          <a:bodyPr>
+            <a:normAutofit/>
+          </a:bodyPr>
+          <a:lstStyle/>
+          <a:p>
+            <a:r>
+              <a:rPr lang="en-US" sz="2800" b="1" cap="all" dirty="0" err="1"/>
+              <a:t>Tại</a:t>
+            </a:r>
+            <a:r>
+              <a:rPr lang="en-US" sz="2800" b="1" cap="all" dirty="0"/>
+              <a:t> </a:t>
+            </a:r>
+            <a:r>
+              <a:rPr lang="en-US" sz="2800" b="1" cap="all" dirty="0" err="1"/>
+              <a:t>sao</a:t>
+            </a:r>
+            <a:r>
+              <a:rPr lang="en-US" sz="2800" b="1" cap="all" dirty="0"/>
+              <a:t> </a:t>
+            </a:r>
+            <a:r>
+              <a:rPr lang="en-US" sz="2800" b="1" cap="all" dirty="0" err="1"/>
+              <a:t>dùng</a:t>
+            </a:r>
+            <a:r>
+              <a:rPr lang="en-US" sz="2800" b="1" cap="all" dirty="0"/>
+              <a:t> LSTM </a:t>
+            </a:r>
+            <a:r>
+              <a:rPr lang="en-US" sz="2800" b="1" cap="all" dirty="0" err="1"/>
+              <a:t>cho</a:t>
+            </a:r>
+            <a:r>
+              <a:rPr lang="en-US" sz="2800" b="1" cap="all" dirty="0"/>
+              <a:t> </a:t>
+            </a:r>
+            <a:r>
+              <a:rPr lang="en-US" sz="2800" b="1" cap="all" dirty="0" err="1"/>
+              <a:t>Chứng</a:t>
+            </a:r>
+            <a:r>
+              <a:rPr lang="en-US" sz="2800" b="1" cap="all" dirty="0"/>
+              <a:t> </a:t>
+            </a:r>
+            <a:r>
+              <a:rPr lang="en-US" sz="2800" b="1" cap="all" dirty="0" err="1"/>
+              <a:t>khoán</a:t>
+            </a:r>
+            <a:r>
+              <a:rPr lang="en-US" sz="2800" b="1" cap="all" dirty="0" smtClean="0"/>
+              <a:t>?</a:t>
+            </a:r>
+            <a:endParaRPr lang="en-US" sz="2800" dirty="0"/>
+          </a:p>
+        </p:txBody>
+      </p:sp>
+      <p:sp>
+        <p:nvSpPr>
+          <p:cNvPr id="3" name="Content Placeholder 2"/>
+          <p:cNvSpPr>
+            <a:spLocks noGrp="1"/>
+          </p:cNvSpPr>
+          <p:nvPr>
+            <p:ph sz="half" idx="1"/>
+          </p:nvPr>
+        </p:nvSpPr>
+        <p:spPr/>
+        <p:txBody>
+          <a:bodyPr anchor="ctr">
+            <a:normAutofit/>
+          </a:bodyPr>
+          <a:lstStyle/>
+          <a:p>
+            <a:pPr marL="0" indent="0">
+              <a:buNone/>
+            </a:pPr>
+            <a:r>
+              <a:rPr lang="vi-VN" sz="1600" b="1" dirty="0"/>
+              <a:t>Trong chứng khoán, giá cổ phiếu không chỉ phụ thuộc vào ngày hôm qua mà còn bị ảnh hưởng bởi các chu kỳ, xu hướng từ nhiều tuần hoặc nhiều tháng trước. LSTM chính là công cụ mạnh mẽ nhất để giải quyết bài toán này.</a:t>
+            </a:r>
+            <a:endParaRPr lang="en-US" sz="1600" b="1" dirty="0" smtClean="0"/>
+          </a:p>
+          <a:p>
+            <a:r>
+              <a:rPr lang="vi-VN" sz="1600" b="1" dirty="0" smtClean="0"/>
+              <a:t>Khả </a:t>
+            </a:r>
+            <a:r>
+              <a:rPr lang="vi-VN" sz="1600" b="1" dirty="0"/>
+              <a:t>năng ghi nhớ:</a:t>
+            </a:r>
+            <a:r>
+              <a:rPr lang="vi-VN" sz="1600" dirty="0"/>
+              <a:t> Xử lý các chuỗi dữ liệu dài hạn vượt trội hơn RNN truyền thống.</a:t>
+            </a:r>
+          </a:p>
+          <a:p>
+            <a:r>
+              <a:rPr lang="vi-VN" sz="1600" b="1" dirty="0"/>
+              <a:t>Dữ liệu phi tuyến tính:</a:t>
+            </a:r>
+            <a:r>
+              <a:rPr lang="vi-VN" sz="1600" dirty="0"/>
+              <a:t> Hiểu được các biến động phức tạp không theo đường thẳng của thị trường.</a:t>
+            </a:r>
+          </a:p>
+          <a:p>
+            <a:r>
+              <a:rPr lang="vi-VN" sz="1600" b="1" dirty="0"/>
+              <a:t>Phát hiện mẫu hình:</a:t>
+            </a:r>
+            <a:r>
+              <a:rPr lang="vi-VN" sz="1600" dirty="0"/>
+              <a:t> Tự động nhận diện các tín hiệu mà mắt người thường bỏ sót</a:t>
+            </a:r>
+            <a:r>
+              <a:rPr lang="vi-VN" sz="1600" dirty="0" smtClean="0"/>
+              <a:t>.</a:t>
+            </a:r>
+            <a:endParaRPr lang="vi-VN" sz="1600" dirty="0"/>
+          </a:p>
+        </p:txBody>
+      </p:sp>
+      <p:pic>
+        <p:nvPicPr>
+          <p:cNvPr id="2051" name="Picture 3"/>
+          <p:cNvPicPr>
+            <a:picLocks noChangeAspect="1" noChangeArrowheads="1"/>
+          </p:cNvPicPr>
+          <p:nvPr/>
+        </p:nvPicPr>
+        <p:blipFill>
+          <a:blip r:embed="rId2">
+            <a:extLst>
+              <a:ext uri="{28A0092B-C50C-407E-A947-70E740481C1C}">
+                <a14:useLocalDpi xmlns:a14="http://schemas.microsoft.com/office/drawing/2010/main" val="0"/>
+              </a:ext>
+            </a:extLst>
+          </a:blip>
+          <a:srcRect/>
+          <a:stretch>
+            <a:fillRect/>
+          </a:stretch>
+        </p:blipFill>
+        <p:spPr bwMode="auto">
+          <a:xfrm>
+            <a:off x="4648200" y="2590800"/>
+            <a:ext cx="4267200" cy="2362200"/>
+          </a:xfrm>
+          <a:prstGeom prst="rect">
+            <a:avLst/>
+          </a:prstGeom>
+          <a:noFill/>
+          <a:ln>
+            <a:noFill/>
+          </a:ln>
+          <a:effectLst/>
+          <a:extLst>
+            <a:ext uri="{909E8E84-426E-40DD-AFC4-6F175D3DCCD1}">
+              <a14:hiddenFill xmlns:a14="http://schemas.microsoft.com/office/drawing/2010/main">
+                <a:solidFill>
+                  <a:schemeClr val="accent1"/>
+                </a:solidFill>
+              </a14:hiddenFill>
+            </a:ext>
+            <a:ext uri="{91240B29-F687-4F45-9708-019B960494DF}">
+              <a14:hiddenLine xmlns:a14="http://schemas.microsoft.com/office/drawing/2010/main" w="9525">
+                <a:solidFill>
+                  <a:schemeClr val="tx1"/>
+                </a:solidFill>
+                <a:miter lim="800000"/>
+                <a:headEnd/>
+                <a:tailEnd/>
+              </a14:hiddenLine>
+            </a:ext>
+            <a:ext uri="{AF507438-7753-43E0-B8FC-AC1667EBCBE1}">
+              <a14:hiddenEffects xmlns:a14="http://schemas.microsoft.com/office/drawing/2010/main">
+                <a:effectLst>
+                  <a:outerShdw dist="35921" dir="2700000" algn="ctr" rotWithShape="0">
+                    <a:schemeClr val="bg2"/>
+                  </a:outerShdw>
+                </a:effectLst>
+              </a14:hiddenEffects>
+            </a:ext>
+          </a:extLst>
+        </p:spPr>
+      </p:pic>
+    </p:spTree>
+    <p:extLst>
+      <p:ext uri="{BB962C8B-B14F-4D97-AF65-F5344CB8AC3E}">
         <p14:creationId xmlns:p14="http://schemas.microsoft.com/office/powerpoint/2010/main" val="428098448"/>
       </p:ext>
     </p:extLst>
@@ -9133,7 +10215,7 @@
 </p:sld>
 </file>
 
-<file path=ppt/slides/slide6.xml><?xml version="1.0" encoding="utf-8"?>
+<file path=ppt/slides/slide8.xml><?xml version="1.0" encoding="utf-8"?>
 <p:sld xmlns:a="http://schemas.openxmlformats.org/drawingml/2006/main" xmlns:r="http://schemas.openxmlformats.org/officeDocument/2006/relationships" xmlns:p="http://schemas.openxmlformats.org/presentationml/2006/main">
   <p:cSld>
     <p:spTree>
@@ -11279,7 +12361,7 @@
 </p:sld>
 </file>
 
-<file path=ppt/slides/slide7.xml><?xml version="1.0" encoding="utf-8"?>
+<file path=ppt/slides/slide9.xml><?xml version="1.0" encoding="utf-8"?>
 <p:sld xmlns:a="http://schemas.openxmlformats.org/drawingml/2006/main" xmlns:r="http://schemas.openxmlformats.org/officeDocument/2006/relationships" xmlns:p="http://schemas.openxmlformats.org/presentationml/2006/main">
   <p:cSld>
     <p:spTree>
@@ -11492,514 +12574,6 @@
     <p:extLst>
       <p:ext uri="{BB962C8B-B14F-4D97-AF65-F5344CB8AC3E}">
         <p14:creationId xmlns:p14="http://schemas.microsoft.com/office/powerpoint/2010/main" val="2397194340"/>
-      </p:ext>
-    </p:extLst>
-  </p:cSld>
-  <p:clrMapOvr>
-    <a:masterClrMapping/>
-  </p:clrMapOvr>
-  <p:timing>
-    <p:tnLst>
-      <p:par>
-        <p:cTn id="1" dur="indefinite" restart="never" nodeType="tmRoot"/>
-      </p:par>
-    </p:tnLst>
-  </p:timing>
-</p:sld>
-</file>
-
-<file path=ppt/slides/slide8.xml><?xml version="1.0" encoding="utf-8"?>
-<p:sld xmlns:a="http://schemas.openxmlformats.org/drawingml/2006/main" xmlns:r="http://schemas.openxmlformats.org/officeDocument/2006/relationships" xmlns:p="http://schemas.openxmlformats.org/presentationml/2006/main">
-  <p:cSld>
-    <p:spTree>
-      <p:nvGrpSpPr>
-        <p:cNvPr id="1" name=""/>
-        <p:cNvGrpSpPr/>
-        <p:nvPr/>
-      </p:nvGrpSpPr>
-      <p:grpSpPr>
-        <a:xfrm>
-          <a:off x="0" y="0"/>
-          <a:ext cx="0" cy="0"/>
-          <a:chOff x="0" y="0"/>
-          <a:chExt cx="0" cy="0"/>
-        </a:xfrm>
-      </p:grpSpPr>
-      <p:sp>
-        <p:nvSpPr>
-          <p:cNvPr id="2" name="Title 1"/>
-          <p:cNvSpPr>
-            <a:spLocks noGrp="1"/>
-          </p:cNvSpPr>
-          <p:nvPr>
-            <p:ph type="title"/>
-          </p:nvPr>
-        </p:nvSpPr>
-        <p:spPr/>
-        <p:txBody>
-          <a:bodyPr>
-            <a:normAutofit/>
-          </a:bodyPr>
-          <a:lstStyle/>
-          <a:p>
-            <a:r>
-              <a:rPr lang="vi-VN" sz="2800" b="1" cap="all" dirty="0"/>
-              <a:t>Dự báo tương lai (Encoder-Decoder</a:t>
-            </a:r>
-            <a:r>
-              <a:rPr lang="vi-VN" sz="2800" b="1" cap="all" dirty="0" smtClean="0"/>
-              <a:t>)</a:t>
-            </a:r>
-            <a:endParaRPr lang="en-US" sz="2800" dirty="0"/>
-          </a:p>
-        </p:txBody>
-      </p:sp>
-      <p:sp>
-        <p:nvSpPr>
-          <p:cNvPr id="3" name="Content Placeholder 2"/>
-          <p:cNvSpPr>
-            <a:spLocks noGrp="1"/>
-          </p:cNvSpPr>
-          <p:nvPr>
-            <p:ph sz="half" idx="1"/>
-          </p:nvPr>
-        </p:nvSpPr>
-        <p:spPr/>
-        <p:txBody>
-          <a:bodyPr anchor="ctr">
-            <a:normAutofit/>
-          </a:bodyPr>
-          <a:lstStyle/>
-          <a:p>
-            <a:r>
-              <a:rPr lang="vi-VN" sz="2000" b="1" dirty="0"/>
-              <a:t>Encoder (Mã hóa)</a:t>
-            </a:r>
-          </a:p>
-          <a:p>
-            <a:r>
-              <a:rPr lang="vi-VN" sz="2000" dirty="0"/>
-              <a:t>Nén 60 ngày dữ liệu lịch sử thành một vector thông tin đặc trưng (Context Vector). Đây là "bộ nhớ" tóm tắt quá khứ</a:t>
-            </a:r>
-            <a:r>
-              <a:rPr lang="vi-VN" sz="2000" dirty="0" smtClean="0"/>
-              <a:t>.</a:t>
-            </a:r>
-            <a:endParaRPr lang="vi-VN" sz="2000" dirty="0"/>
-          </a:p>
-        </p:txBody>
-      </p:sp>
-      <p:sp>
-        <p:nvSpPr>
-          <p:cNvPr id="4" name="Content Placeholder 3"/>
-          <p:cNvSpPr>
-            <a:spLocks noGrp="1"/>
-          </p:cNvSpPr>
-          <p:nvPr>
-            <p:ph sz="half" idx="2"/>
-          </p:nvPr>
-        </p:nvSpPr>
-        <p:spPr/>
-        <p:txBody>
-          <a:bodyPr anchor="ctr">
-            <a:normAutofit/>
-          </a:bodyPr>
-          <a:lstStyle/>
-          <a:p>
-            <a:r>
-              <a:rPr lang="en-US" sz="2000" b="1" dirty="0"/>
-              <a:t>Decoder (</a:t>
-            </a:r>
-            <a:r>
-              <a:rPr lang="en-US" sz="2000" b="1" dirty="0" err="1"/>
-              <a:t>Giải</a:t>
-            </a:r>
-            <a:r>
-              <a:rPr lang="en-US" sz="2000" b="1" dirty="0"/>
-              <a:t> </a:t>
-            </a:r>
-            <a:r>
-              <a:rPr lang="en-US" sz="2000" b="1" dirty="0" err="1"/>
-              <a:t>mã</a:t>
-            </a:r>
-            <a:r>
-              <a:rPr lang="en-US" sz="2000" b="1" dirty="0"/>
-              <a:t>)</a:t>
-            </a:r>
-          </a:p>
-          <a:p>
-            <a:r>
-              <a:rPr lang="en-US" sz="2000" dirty="0" err="1"/>
-              <a:t>Từ</a:t>
-            </a:r>
-            <a:r>
-              <a:rPr lang="en-US" sz="2000" dirty="0"/>
-              <a:t> vector </a:t>
-            </a:r>
-            <a:r>
-              <a:rPr lang="en-US" sz="2000" dirty="0" err="1"/>
-              <a:t>bối</a:t>
-            </a:r>
-            <a:r>
-              <a:rPr lang="en-US" sz="2000" dirty="0"/>
-              <a:t> </a:t>
-            </a:r>
-            <a:r>
-              <a:rPr lang="en-US" sz="2000" dirty="0" err="1"/>
-              <a:t>cảnh</a:t>
-            </a:r>
-            <a:r>
-              <a:rPr lang="en-US" sz="2000" dirty="0"/>
-              <a:t>, </a:t>
-            </a:r>
-            <a:r>
-              <a:rPr lang="en-US" sz="2000" dirty="0" err="1"/>
-              <a:t>mô</a:t>
-            </a:r>
-            <a:r>
-              <a:rPr lang="en-US" sz="2000" dirty="0"/>
-              <a:t> </a:t>
-            </a:r>
-            <a:r>
-              <a:rPr lang="en-US" sz="2000" dirty="0" err="1"/>
-              <a:t>hình</a:t>
-            </a:r>
-            <a:r>
-              <a:rPr lang="en-US" sz="2000" dirty="0"/>
-              <a:t> "</a:t>
-            </a:r>
-            <a:r>
-              <a:rPr lang="en-US" sz="2000" dirty="0" err="1"/>
-              <a:t>vẽ</a:t>
-            </a:r>
-            <a:r>
-              <a:rPr lang="en-US" sz="2000" dirty="0"/>
-              <a:t>" </a:t>
-            </a:r>
-            <a:r>
-              <a:rPr lang="en-US" sz="2000" dirty="0" err="1"/>
-              <a:t>ra</a:t>
-            </a:r>
-            <a:r>
-              <a:rPr lang="en-US" sz="2000" dirty="0"/>
-              <a:t> </a:t>
-            </a:r>
-            <a:r>
-              <a:rPr lang="en-US" sz="2000" dirty="0" err="1"/>
-              <a:t>chuỗi</a:t>
-            </a:r>
-            <a:r>
-              <a:rPr lang="en-US" sz="2000" dirty="0"/>
-              <a:t> </a:t>
-            </a:r>
-            <a:r>
-              <a:rPr lang="en-US" sz="2000" dirty="0" err="1"/>
-              <a:t>giá</a:t>
-            </a:r>
-            <a:r>
-              <a:rPr lang="en-US" sz="2000" dirty="0"/>
-              <a:t> </a:t>
-            </a:r>
-            <a:r>
-              <a:rPr lang="en-US" sz="2000" dirty="0" err="1"/>
-              <a:t>dự</a:t>
-            </a:r>
-            <a:r>
-              <a:rPr lang="en-US" sz="2000" dirty="0"/>
-              <a:t> </a:t>
-            </a:r>
-            <a:r>
-              <a:rPr lang="en-US" sz="2000" dirty="0" err="1"/>
-              <a:t>kiến</a:t>
-            </a:r>
-            <a:r>
-              <a:rPr lang="en-US" sz="2000" dirty="0"/>
-              <a:t> </a:t>
-            </a:r>
-            <a:r>
-              <a:rPr lang="en-US" sz="2000" dirty="0" err="1"/>
-              <a:t>cho</a:t>
-            </a:r>
-            <a:r>
-              <a:rPr lang="en-US" sz="2000" dirty="0"/>
-              <a:t> 7 </a:t>
-            </a:r>
-            <a:r>
-              <a:rPr lang="en-US" sz="2000" dirty="0" err="1"/>
-              <a:t>ngày</a:t>
-            </a:r>
-            <a:r>
-              <a:rPr lang="en-US" sz="2000" dirty="0"/>
-              <a:t> </a:t>
-            </a:r>
-            <a:r>
-              <a:rPr lang="en-US" sz="2000" dirty="0" err="1"/>
-              <a:t>tiếp</a:t>
-            </a:r>
-            <a:r>
-              <a:rPr lang="en-US" sz="2000" dirty="0"/>
-              <a:t> </a:t>
-            </a:r>
-            <a:r>
-              <a:rPr lang="en-US" sz="2000" dirty="0" err="1"/>
-              <a:t>theo</a:t>
-            </a:r>
-            <a:r>
-              <a:rPr lang="en-US" sz="2000" dirty="0"/>
-              <a:t> </a:t>
-            </a:r>
-            <a:r>
-              <a:rPr lang="en-US" sz="2000" dirty="0" err="1"/>
-              <a:t>một</a:t>
-            </a:r>
-            <a:r>
-              <a:rPr lang="en-US" sz="2000" dirty="0"/>
-              <a:t> </a:t>
-            </a:r>
-            <a:r>
-              <a:rPr lang="en-US" sz="2000" dirty="0" err="1"/>
-              <a:t>cách</a:t>
-            </a:r>
-            <a:r>
-              <a:rPr lang="en-US" sz="2000" dirty="0"/>
-              <a:t> </a:t>
-            </a:r>
-            <a:r>
-              <a:rPr lang="en-US" sz="2000" dirty="0" err="1"/>
-              <a:t>tuần</a:t>
-            </a:r>
-            <a:r>
-              <a:rPr lang="en-US" sz="2000" dirty="0"/>
-              <a:t> </a:t>
-            </a:r>
-            <a:r>
-              <a:rPr lang="en-US" sz="2000" dirty="0" err="1"/>
-              <a:t>tự</a:t>
-            </a:r>
-            <a:r>
-              <a:rPr lang="en-US" sz="2000" dirty="0"/>
-              <a:t> </a:t>
-            </a:r>
-            <a:r>
-              <a:rPr lang="en-US" sz="2000" dirty="0" err="1"/>
-              <a:t>và</a:t>
-            </a:r>
-            <a:r>
-              <a:rPr lang="en-US" sz="2000" dirty="0"/>
-              <a:t> logic</a:t>
-            </a:r>
-            <a:r>
-              <a:rPr lang="en-US" sz="2000" dirty="0" smtClean="0"/>
-              <a:t>.</a:t>
-            </a:r>
-            <a:endParaRPr lang="en-US" sz="2000" dirty="0"/>
-          </a:p>
-        </p:txBody>
-      </p:sp>
-      <p:sp>
-        <p:nvSpPr>
-          <p:cNvPr id="5" name="TextBox 4"/>
-          <p:cNvSpPr txBox="1"/>
-          <p:nvPr/>
-        </p:nvSpPr>
-        <p:spPr>
-          <a:xfrm>
-            <a:off x="152401" y="6378909"/>
-            <a:ext cx="8839200" cy="307777"/>
-          </a:xfrm>
-          <a:prstGeom prst="rect">
-            <a:avLst/>
-          </a:prstGeom>
-          <a:noFill/>
-        </p:spPr>
-        <p:txBody>
-          <a:bodyPr wrap="square" rtlCol="0">
-            <a:spAutoFit/>
-          </a:bodyPr>
-          <a:lstStyle/>
-          <a:p>
-            <a:r>
-              <a:rPr lang="vi-VN" sz="1400" b="1" dirty="0"/>
-              <a:t>Ưu điểm vượt trội:</a:t>
-            </a:r>
-            <a:r>
-              <a:rPr lang="vi-VN" sz="1400" dirty="0"/>
-              <a:t> Hạn chế tối đa sai số tích tụ so với phương pháp dự báo từng ngày một truyền thống.</a:t>
-            </a:r>
-            <a:endParaRPr lang="en-US" sz="1400" dirty="0"/>
-          </a:p>
-        </p:txBody>
-      </p:sp>
-    </p:spTree>
-    <p:extLst>
-      <p:ext uri="{BB962C8B-B14F-4D97-AF65-F5344CB8AC3E}">
-        <p14:creationId xmlns:p14="http://schemas.microsoft.com/office/powerpoint/2010/main" val="991988898"/>
-      </p:ext>
-    </p:extLst>
-  </p:cSld>
-  <p:clrMapOvr>
-    <a:masterClrMapping/>
-  </p:clrMapOvr>
-  <p:timing>
-    <p:tnLst>
-      <p:par>
-        <p:cTn id="1" dur="indefinite" restart="never" nodeType="tmRoot"/>
-      </p:par>
-    </p:tnLst>
-  </p:timing>
-</p:sld>
-</file>
-
-<file path=ppt/slides/slide9.xml><?xml version="1.0" encoding="utf-8"?>
-<p:sld xmlns:a="http://schemas.openxmlformats.org/drawingml/2006/main" xmlns:r="http://schemas.openxmlformats.org/officeDocument/2006/relationships" xmlns:p="http://schemas.openxmlformats.org/presentationml/2006/main">
-  <p:cSld>
-    <p:spTree>
-      <p:nvGrpSpPr>
-        <p:cNvPr id="1" name=""/>
-        <p:cNvGrpSpPr/>
-        <p:nvPr/>
-      </p:nvGrpSpPr>
-      <p:grpSpPr>
-        <a:xfrm>
-          <a:off x="0" y="0"/>
-          <a:ext cx="0" cy="0"/>
-          <a:chOff x="0" y="0"/>
-          <a:chExt cx="0" cy="0"/>
-        </a:xfrm>
-      </p:grpSpPr>
-      <p:sp>
-        <p:nvSpPr>
-          <p:cNvPr id="2" name="Title 1"/>
-          <p:cNvSpPr>
-            <a:spLocks noGrp="1"/>
-          </p:cNvSpPr>
-          <p:nvPr>
-            <p:ph type="title"/>
-          </p:nvPr>
-        </p:nvSpPr>
-        <p:spPr/>
-        <p:txBody>
-          <a:bodyPr>
-            <a:normAutofit/>
-          </a:bodyPr>
-          <a:lstStyle/>
-          <a:p>
-            <a:r>
-              <a:rPr lang="en-US" sz="2800" b="1" cap="all" dirty="0" err="1"/>
-              <a:t>Kết</a:t>
-            </a:r>
-            <a:r>
-              <a:rPr lang="en-US" sz="2800" b="1" cap="all" dirty="0"/>
-              <a:t> </a:t>
-            </a:r>
-            <a:r>
-              <a:rPr lang="en-US" sz="2800" b="1" cap="all" dirty="0" err="1"/>
-              <a:t>quả</a:t>
-            </a:r>
-            <a:r>
-              <a:rPr lang="en-US" sz="2800" b="1" cap="all" dirty="0"/>
-              <a:t> </a:t>
-            </a:r>
-            <a:r>
-              <a:rPr lang="en-US" sz="2800" b="1" cap="all" dirty="0" err="1"/>
-              <a:t>Backtest</a:t>
-            </a:r>
-            <a:r>
-              <a:rPr lang="en-US" sz="2800" b="1" cap="all" dirty="0"/>
-              <a:t> &amp; </a:t>
-            </a:r>
-            <a:r>
-              <a:rPr lang="en-US" sz="2800" b="1" cap="all" dirty="0" err="1"/>
-              <a:t>Trực</a:t>
-            </a:r>
-            <a:r>
-              <a:rPr lang="en-US" sz="2800" b="1" cap="all" dirty="0"/>
-              <a:t> </a:t>
-            </a:r>
-            <a:r>
-              <a:rPr lang="en-US" sz="2800" b="1" cap="all" dirty="0" err="1"/>
-              <a:t>quan</a:t>
-            </a:r>
-            <a:r>
-              <a:rPr lang="en-US" sz="2800" b="1" cap="all" dirty="0"/>
-              <a:t> </a:t>
-            </a:r>
-            <a:r>
-              <a:rPr lang="en-US" sz="2800" b="1" cap="all" dirty="0" err="1" smtClean="0"/>
-              <a:t>hóa</a:t>
-            </a:r>
-            <a:endParaRPr lang="en-US" sz="2800" dirty="0"/>
-          </a:p>
-        </p:txBody>
-      </p:sp>
-      <p:pic>
-        <p:nvPicPr>
-          <p:cNvPr id="2051" name="Picture 3"/>
-          <p:cNvPicPr>
-            <a:picLocks noChangeAspect="1" noChangeArrowheads="1"/>
-          </p:cNvPicPr>
-          <p:nvPr/>
-        </p:nvPicPr>
-        <p:blipFill>
-          <a:blip r:embed="rId2">
-            <a:extLst>
-              <a:ext uri="{28A0092B-C50C-407E-A947-70E740481C1C}">
-                <a14:useLocalDpi xmlns:a14="http://schemas.microsoft.com/office/drawing/2010/main" val="0"/>
-              </a:ext>
-            </a:extLst>
-          </a:blip>
-          <a:srcRect/>
-          <a:stretch>
-            <a:fillRect/>
-          </a:stretch>
-        </p:blipFill>
-        <p:spPr bwMode="auto">
-          <a:xfrm>
-            <a:off x="152400" y="1828800"/>
-            <a:ext cx="8839200" cy="4163234"/>
-          </a:xfrm>
-          <a:prstGeom prst="rect">
-            <a:avLst/>
-          </a:prstGeom>
-          <a:noFill/>
-          <a:ln>
-            <a:noFill/>
-          </a:ln>
-          <a:effectLst/>
-          <a:extLst>
-            <a:ext uri="{909E8E84-426E-40DD-AFC4-6F175D3DCCD1}">
-              <a14:hiddenFill xmlns:a14="http://schemas.microsoft.com/office/drawing/2010/main">
-                <a:solidFill>
-                  <a:schemeClr val="accent1"/>
-                </a:solidFill>
-              </a14:hiddenFill>
-            </a:ext>
-            <a:ext uri="{91240B29-F687-4F45-9708-019B960494DF}">
-              <a14:hiddenLine xmlns:a14="http://schemas.microsoft.com/office/drawing/2010/main" w="9525">
-                <a:solidFill>
-                  <a:schemeClr val="tx1"/>
-                </a:solidFill>
-                <a:miter lim="800000"/>
-                <a:headEnd/>
-                <a:tailEnd/>
-              </a14:hiddenLine>
-            </a:ext>
-            <a:ext uri="{AF507438-7753-43E0-B8FC-AC1667EBCBE1}">
-              <a14:hiddenEffects xmlns:a14="http://schemas.microsoft.com/office/drawing/2010/main">
-                <a:effectLst>
-                  <a:outerShdw dist="35921" dir="2700000" algn="ctr" rotWithShape="0">
-                    <a:schemeClr val="bg2"/>
-                  </a:outerShdw>
-                </a:effectLst>
-              </a14:hiddenEffects>
-            </a:ext>
-          </a:extLst>
-        </p:spPr>
-      </p:pic>
-    </p:spTree>
-    <p:extLst>
-      <p:ext uri="{BB962C8B-B14F-4D97-AF65-F5344CB8AC3E}">
-        <p14:creationId xmlns:p14="http://schemas.microsoft.com/office/powerpoint/2010/main" val="3278575000"/>
       </p:ext>
     </p:extLst>
   </p:cSld>
